--- a/dataset/guides_final/SW/manual/IT-SW-001-M_SW 설치 요청 처리 매뉴얼.pptx
+++ b/dataset/guides_final/SW/manual/IT-SW-001-M_SW 설치 요청 처리 매뉴얼.pptx
@@ -22555,7 +22555,7 @@
                 <a:ea typeface="Malgun Gothic"/>
                 <a:cs typeface="Malgun Gothic"/>
               </a:rPr>
-              <a:t>티켓: 담당자 조치가 필요한 건. 담당 팀에 배정하고 상태를 RDY → IP → FIN → CLS 로 관리한다. FIN은 담당자 처리 완료, CLS는 문의자가 해결을 확인한 최종</a:t>
+              <a:t>티켓: 담당자 조치가 필요한 건. 담당 팀에 배정하고 상태를 RDY → WIP → FIN → CLS 로 관리한다. FIN은 담당자 처리 완료, CLS는 문의자가 해결을 확인한 최종</a:t>
             </a:r>
           </a:p>
           <a:p>

--- a/dataset/guides_final/SW/manual/IT-SW-001-M_SW 설치 요청 처리 매뉴얼.pptx
+++ b/dataset/guides_final/SW/manual/IT-SW-001-M_SW 설치 요청 처리 매뉴얼.pptx
@@ -3234,7 +3234,7 @@
                 <a:ea typeface="Malgun Gothic"/>
                 <a:cs typeface="Malgun Gothic"/>
               </a:rPr>
-              <a:t>한화시스템 ICT IT 담당자 매뉴얼 · SW·라이선스</a:t>
+              <a:t>가상 ICT 기업 IT 담당자 매뉴얼 · SW·라이선스</a:t>
             </a:r>
           </a:p>
         </p:txBody>
@@ -3513,7 +3513,7 @@
                 <a:ea typeface="Malgun Gothic"/>
                 <a:cs typeface="Malgun Gothic"/>
               </a:rPr>
-              <a:t>© HANWHA SYSTEMS ICT · IT-SW-001-M · 사내 제한</a:t>
+              <a:t>© 가상 ICT 기업 · IT-SW-001-M · 사내 제한</a:t>
             </a:r>
           </a:p>
         </p:txBody>
@@ -4438,7 +4438,7 @@
                 <a:ea typeface="Malgun Gothic"/>
                 <a:cs typeface="Malgun Gothic"/>
               </a:rPr>
-              <a:t>© HANWHA SYSTEMS ICT · IT-SW-001-M · 사내 제한</a:t>
+              <a:t>© 가상 ICT 기업 · IT-SW-001-M · 사내 제한</a:t>
             </a:r>
           </a:p>
         </p:txBody>
@@ -7190,7 +7190,7 @@
                 <a:ea typeface="Malgun Gothic"/>
                 <a:cs typeface="Malgun Gothic"/>
               </a:rPr>
-              <a:t>© HANWHA SYSTEMS ICT · IT-SW-001-M · 사내 제한</a:t>
+              <a:t>© 가상 ICT 기업 · IT-SW-001-M · 사내 제한</a:t>
             </a:r>
           </a:p>
         </p:txBody>
@@ -8295,7 +8295,7 @@
                 <a:ea typeface="Malgun Gothic"/>
                 <a:cs typeface="Malgun Gothic"/>
               </a:rPr>
-              <a:t>© HANWHA SYSTEMS ICT · IT-SW-001-M · 사내 제한</a:t>
+              <a:t>© 가상 ICT 기업 · IT-SW-001-M · 사내 제한</a:t>
             </a:r>
           </a:p>
         </p:txBody>
@@ -10851,7 +10851,7 @@
                 <a:ea typeface="Malgun Gothic"/>
                 <a:cs typeface="Malgun Gothic"/>
               </a:rPr>
-              <a:t>© HANWHA SYSTEMS ICT · IT-SW-001-M · 사내 제한</a:t>
+              <a:t>© 가상 ICT 기업 · IT-SW-001-M · 사내 제한</a:t>
             </a:r>
           </a:p>
         </p:txBody>
@@ -11776,7 +11776,7 @@
                 <a:ea typeface="Malgun Gothic"/>
                 <a:cs typeface="Malgun Gothic"/>
               </a:rPr>
-              <a:t>© HANWHA SYSTEMS ICT · IT-SW-001-M · 사내 제한</a:t>
+              <a:t>© 가상 ICT 기업 · IT-SW-001-M · 사내 제한</a:t>
             </a:r>
           </a:p>
         </p:txBody>
@@ -12024,7 +12024,7 @@
                 <a:ea typeface="Malgun Gothic"/>
                 <a:cs typeface="Malgun Gothic"/>
               </a:rPr>
-              <a:t>© HANWHA SYSTEMS ICT · IT-SW-001-M · 사내 제한</a:t>
+              <a:t>© 가상 ICT 기업 · IT-SW-001-M · 사내 제한</a:t>
             </a:r>
           </a:p>
         </p:txBody>
@@ -12707,7 +12707,7 @@
                 <a:ea typeface="Malgun Gothic"/>
                 <a:cs typeface="Malgun Gothic"/>
               </a:rPr>
-              <a:t>© HANWHA SYSTEMS ICT · IT-SW-001-M · 사내 제한</a:t>
+              <a:t>© 가상 ICT 기업 · IT-SW-001-M · 사내 제한</a:t>
             </a:r>
           </a:p>
         </p:txBody>
@@ -12955,7 +12955,7 @@
                 <a:ea typeface="Malgun Gothic"/>
                 <a:cs typeface="Malgun Gothic"/>
               </a:rPr>
-              <a:t>© HANWHA SYSTEMS ICT · IT-SW-001-M · 사내 제한</a:t>
+              <a:t>© 가상 ICT 기업 · IT-SW-001-M · 사내 제한</a:t>
             </a:r>
           </a:p>
         </p:txBody>
@@ -13983,7 +13983,7 @@
                 <a:ea typeface="Malgun Gothic"/>
                 <a:cs typeface="Malgun Gothic"/>
               </a:rPr>
-              <a:t>© HANWHA SYSTEMS ICT · IT-SW-001-M · 사내 제한</a:t>
+              <a:t>© 가상 ICT 기업 · IT-SW-001-M · 사내 제한</a:t>
             </a:r>
           </a:p>
         </p:txBody>
@@ -14231,7 +14231,7 @@
                 <a:ea typeface="Malgun Gothic"/>
                 <a:cs typeface="Malgun Gothic"/>
               </a:rPr>
-              <a:t>© HANWHA SYSTEMS ICT · IT-SW-001-M · 사내 제한</a:t>
+              <a:t>© 가상 ICT 기업 · IT-SW-001-M · 사내 제한</a:t>
             </a:r>
           </a:p>
         </p:txBody>
@@ -15874,7 +15874,7 @@
                 <a:ea typeface="Malgun Gothic"/>
                 <a:cs typeface="Malgun Gothic"/>
               </a:rPr>
-              <a:t>© HANWHA SYSTEMS ICT · IT-SW-001-M · 사내 제한</a:t>
+              <a:t>© 가상 ICT 기업 · IT-SW-001-M · 사내 제한</a:t>
             </a:r>
           </a:p>
         </p:txBody>
@@ -17186,7 +17186,7 @@
                 <a:ea typeface="Malgun Gothic"/>
                 <a:cs typeface="Malgun Gothic"/>
               </a:rPr>
-              <a:t>© HANWHA SYSTEMS ICT · IT-SW-001-M · 사내 제한</a:t>
+              <a:t>© 가상 ICT 기업 · IT-SW-001-M · 사내 제한</a:t>
             </a:r>
           </a:p>
         </p:txBody>
@@ -17894,7 +17894,7 @@
                 <a:ea typeface="Malgun Gothic"/>
                 <a:cs typeface="Malgun Gothic"/>
               </a:rPr>
-              <a:t>© HANWHA SYSTEMS ICT · IT-SW-001-M · 사내 제한</a:t>
+              <a:t>© 가상 ICT 기업 · IT-SW-001-M · 사내 제한</a:t>
             </a:r>
           </a:p>
         </p:txBody>
@@ -19040,7 +19040,7 @@
                 <a:ea typeface="Malgun Gothic"/>
                 <a:cs typeface="Malgun Gothic"/>
               </a:rPr>
-              <a:t>© HANWHA SYSTEMS ICT · IT-SW-001-M · 사내 제한</a:t>
+              <a:t>© 가상 ICT 기업 · IT-SW-001-M · 사내 제한</a:t>
             </a:r>
           </a:p>
         </p:txBody>
@@ -19288,7 +19288,7 @@
                 <a:ea typeface="Malgun Gothic"/>
                 <a:cs typeface="Malgun Gothic"/>
               </a:rPr>
-              <a:t>© HANWHA SYSTEMS ICT · IT-SW-001-M · 사내 제한</a:t>
+              <a:t>© 가상 ICT 기업 · IT-SW-001-M · 사내 제한</a:t>
             </a:r>
           </a:p>
         </p:txBody>
@@ -20210,7 +20210,7 @@
                 <a:ea typeface="Malgun Gothic"/>
                 <a:cs typeface="Malgun Gothic"/>
               </a:rPr>
-              <a:t>© HANWHA SYSTEMS ICT · IT-SW-001-M · 사내 제한</a:t>
+              <a:t>© 가상 ICT 기업 · IT-SW-001-M · 사내 제한</a:t>
             </a:r>
           </a:p>
         </p:txBody>
@@ -20458,7 +20458,7 @@
                 <a:ea typeface="Malgun Gothic"/>
                 <a:cs typeface="Malgun Gothic"/>
               </a:rPr>
-              <a:t>© HANWHA SYSTEMS ICT · IT-SW-001-M · 사내 제한</a:t>
+              <a:t>© 가상 ICT 기업 · IT-SW-001-M · 사내 제한</a:t>
             </a:r>
           </a:p>
         </p:txBody>
@@ -22955,7 +22955,7 @@
                 <a:ea typeface="Malgun Gothic"/>
                 <a:cs typeface="Malgun Gothic"/>
               </a:rPr>
-              <a:t>© HANWHA SYSTEMS ICT · IT-SW-001-M · 사내 제한</a:t>
+              <a:t>© 가상 ICT 기업 · IT-SW-001-M · 사내 제한</a:t>
             </a:r>
           </a:p>
         </p:txBody>
@@ -23203,7 +23203,7 @@
                 <a:ea typeface="Malgun Gothic"/>
                 <a:cs typeface="Malgun Gothic"/>
               </a:rPr>
-              <a:t>© HANWHA SYSTEMS ICT · IT-SW-001-M · 사내 제한</a:t>
+              <a:t>© 가상 ICT 기업 · IT-SW-001-M · 사내 제한</a:t>
             </a:r>
           </a:p>
         </p:txBody>
@@ -25971,7 +25971,7 @@
                 <a:ea typeface="Malgun Gothic"/>
                 <a:cs typeface="Malgun Gothic"/>
               </a:rPr>
-              <a:t>© HANWHA SYSTEMS ICT · IT-SW-001-M · 사내 제한</a:t>
+              <a:t>© 가상 ICT 기업 · IT-SW-001-M · 사내 제한</a:t>
             </a:r>
           </a:p>
         </p:txBody>
